--- a/docs/声盾-答辩演示.pptx
+++ b/docs/声盾-答辩演示.pptx
@@ -514,7 +514,7 @@
           <a:p>
             <a:r>
               <a:rPr lang="en-US" dirty="0"/>
-              <a:t>各位评委老师好！我们是大连理工大学的参赛团队，我是答辩人【成员姓名】。我们的作品叫声盾，一句话定位：在接起电话的那一刻，给普通人一个验真声音的办法——边通话、边检测、边存证。待会儿的演示环节，欢迎各位评委任意给一段文本，我们当场合成、当场检出。它是怎么做到的？请看下一页。</a:t>
+              <a:t>各位评委老师好！我们是大连理工大学「你们说的对」团队，我是本场答辩代表。我们的作品叫声盾，一句话定位：在接起电话的那一刻，给普通人一个验真声音的办法——边通话、边检测、边存证。待会儿的演示环节，欢迎各位评委任意给一段文本，我们当场合成、当场检出。它是怎么做到的？请看下一页。</a:t>
             </a:r>
             <a:endParaRPr lang="en-US" dirty="0"/>
           </a:p>
@@ -3379,7 +3379,7 @@
                 <a:ea typeface="Microsoft YaHei" pitchFamily="34" charset="-122"/>
                 <a:cs typeface="Microsoft YaHei" pitchFamily="34" charset="-120"/>
               </a:rPr>
-              <a:t>【团队名称】</a:t>
+              <a:t>你们说的对</a:t>
             </a:r>
             <a:pPr algn="l" indent="0" marL="0">
               <a:lnSpc>
@@ -3396,7 +3396,7 @@
                 <a:ea typeface="Microsoft YaHei" pitchFamily="34" charset="-122"/>
                 <a:cs typeface="Microsoft YaHei" pitchFamily="34" charset="-120"/>
               </a:rPr>
-              <a:t> · 答辩人：</a:t>
+              <a:t> · 团队成员：</a:t>
             </a:r>
             <a:pPr algn="l" indent="0" marL="0">
               <a:lnSpc>
@@ -3413,7 +3413,41 @@
                 <a:ea typeface="Microsoft YaHei" pitchFamily="34" charset="-122"/>
                 <a:cs typeface="Microsoft YaHei" pitchFamily="34" charset="-120"/>
               </a:rPr>
-              <a:t>【成员姓名】</a:t>
+              <a:t>谭畅 等 </a:t>
+            </a:r>
+            <a:pPr algn="l" indent="0" marL="0">
+              <a:lnSpc>
+                <a:spcPts val="1367"/>
+              </a:lnSpc>
+              <a:buNone/>
+            </a:pPr>
+            <a:r>
+              <a:rPr lang="en-US" sz="844" dirty="0">
+                <a:solidFill>
+                  <a:srgbClr val="F0EBDD"/>
+                </a:solidFill>
+                <a:latin typeface="Arial Narrow" pitchFamily="34" charset="0"/>
+                <a:ea typeface="Arial Narrow" pitchFamily="34" charset="-122"/>
+                <a:cs typeface="Arial Narrow" pitchFamily="34" charset="-120"/>
+              </a:rPr>
+              <a:t>2</a:t>
+            </a:r>
+            <a:pPr algn="l" indent="0" marL="0">
+              <a:lnSpc>
+                <a:spcPts val="1367"/>
+              </a:lnSpc>
+              <a:buNone/>
+            </a:pPr>
+            <a:r>
+              <a:rPr lang="en-US" sz="844" dirty="0">
+                <a:solidFill>
+                  <a:srgbClr val="F0EBDD"/>
+                </a:solidFill>
+                <a:latin typeface="Microsoft YaHei" pitchFamily="34" charset="0"/>
+                <a:ea typeface="Microsoft YaHei" pitchFamily="34" charset="-122"/>
+                <a:cs typeface="Microsoft YaHei" pitchFamily="34" charset="-120"/>
+              </a:rPr>
+              <a:t> 人</a:t>
             </a:r>
             <a:endParaRPr lang="en-US" sz="844" dirty="0"/>
           </a:p>
@@ -12623,7 +12657,7 @@
         <p:spPr>
           <a:xfrm>
             <a:off x="685800" y="4609393"/>
-            <a:ext cx="4450221" cy="219782"/>
+            <a:ext cx="4543090" cy="219782"/>
           </a:xfrm>
           <a:prstGeom prst="rect">
             <a:avLst/>
@@ -12664,8 +12698,8 @@
         </p:nvSpPr>
         <p:spPr>
           <a:xfrm>
-            <a:off x="5150309" y="4673687"/>
-            <a:ext cx="3307891" cy="155488"/>
+            <a:off x="5243178" y="4673687"/>
+            <a:ext cx="3215022" cy="155488"/>
           </a:xfrm>
           <a:prstGeom prst="rect">
             <a:avLst/>
@@ -12692,7 +12726,7 @@
                 <a:ea typeface="Microsoft YaHei" pitchFamily="34" charset="-122"/>
                 <a:cs typeface="Microsoft YaHei" pitchFamily="34" charset="-120"/>
               </a:rPr>
-              <a:t>【团队名称】 · 大连理工大学 · </a:t>
+              <a:t>你们说的对 · 大连理工大学 · </a:t>
             </a:r>
             <a:pPr algn="l" indent="0" marL="0">
               <a:lnSpc>
@@ -28727,7 +28761,7 @@
       </p:sp>
       <p:pic>
         <p:nvPicPr>
-          <p:cNvPr id="40" name="Image 0" descr="/tmp/h2p-fit-1793167940303-rodgai.png">    </p:cNvPr>
+          <p:cNvPr id="40" name="Image 0" descr="/tmp/h2p-fit-1793170383263-a7bczc.png">    </p:cNvPr>
           <p:cNvPicPr>
             <a:picLocks noChangeAspect="1"/>
           </p:cNvPicPr>
@@ -34086,7 +34120,7 @@
       </p:sp>
       <p:pic>
         <p:nvPicPr>
-          <p:cNvPr id="23" name="Image 0" descr="/tmp/h2p-fit-1793167950468-fuk1i2.png">    </p:cNvPr>
+          <p:cNvPr id="23" name="Image 0" descr="/tmp/h2p-fit-1793170390878-6da5bf.png">    </p:cNvPr>
           <p:cNvPicPr>
             <a:picLocks noChangeAspect="1"/>
           </p:cNvPicPr>
